--- a/Deliveries/WES Capstone Video Slides.pptx
+++ b/Deliveries/WES Capstone Video Slides.pptx
@@ -424,7 +424,7 @@
           <a:p>
             <a:fld id="{3FC87381-5F87-4AAF-8B41-540099760EE8}" type="datetimeFigureOut">
               <a:rPr lang="en-US" smtClean="0"/>
-              <a:t>6/6/2026</a:t>
+              <a:t>6/7/2026</a:t>
             </a:fld>
             <a:endParaRPr lang="en-US"/>
           </a:p>
@@ -1990,7 +1990,7 @@
           <a:p>
             <a:fld id="{F55AF960-87D0-487C-BD50-BC6BA87EEF29}" type="datetimeFigureOut">
               <a:rPr lang="en-US" smtClean="0"/>
-              <a:t>6/6/2026</a:t>
+              <a:t>6/7/2026</a:t>
             </a:fld>
             <a:endParaRPr lang="en-US"/>
           </a:p>
@@ -2188,7 +2188,7 @@
           <a:p>
             <a:fld id="{F55AF960-87D0-487C-BD50-BC6BA87EEF29}" type="datetimeFigureOut">
               <a:rPr lang="en-US" smtClean="0"/>
-              <a:t>6/6/2026</a:t>
+              <a:t>6/7/2026</a:t>
             </a:fld>
             <a:endParaRPr lang="en-US"/>
           </a:p>
@@ -2396,7 +2396,7 @@
           <a:p>
             <a:fld id="{F55AF960-87D0-487C-BD50-BC6BA87EEF29}" type="datetimeFigureOut">
               <a:rPr lang="en-US" smtClean="0"/>
-              <a:t>6/6/2026</a:t>
+              <a:t>6/7/2026</a:t>
             </a:fld>
             <a:endParaRPr lang="en-US"/>
           </a:p>
@@ -2594,7 +2594,7 @@
           <a:p>
             <a:fld id="{F55AF960-87D0-487C-BD50-BC6BA87EEF29}" type="datetimeFigureOut">
               <a:rPr lang="en-US" smtClean="0"/>
-              <a:t>6/6/2026</a:t>
+              <a:t>6/7/2026</a:t>
             </a:fld>
             <a:endParaRPr lang="en-US"/>
           </a:p>
@@ -2869,7 +2869,7 @@
           <a:p>
             <a:fld id="{F55AF960-87D0-487C-BD50-BC6BA87EEF29}" type="datetimeFigureOut">
               <a:rPr lang="en-US" smtClean="0"/>
-              <a:t>6/6/2026</a:t>
+              <a:t>6/7/2026</a:t>
             </a:fld>
             <a:endParaRPr lang="en-US"/>
           </a:p>
@@ -3134,7 +3134,7 @@
           <a:p>
             <a:fld id="{F55AF960-87D0-487C-BD50-BC6BA87EEF29}" type="datetimeFigureOut">
               <a:rPr lang="en-US" smtClean="0"/>
-              <a:t>6/6/2026</a:t>
+              <a:t>6/7/2026</a:t>
             </a:fld>
             <a:endParaRPr lang="en-US"/>
           </a:p>
@@ -3546,7 +3546,7 @@
           <a:p>
             <a:fld id="{F55AF960-87D0-487C-BD50-BC6BA87EEF29}" type="datetimeFigureOut">
               <a:rPr lang="en-US" smtClean="0"/>
-              <a:t>6/6/2026</a:t>
+              <a:t>6/7/2026</a:t>
             </a:fld>
             <a:endParaRPr lang="en-US"/>
           </a:p>
@@ -3687,7 +3687,7 @@
           <a:p>
             <a:fld id="{F55AF960-87D0-487C-BD50-BC6BA87EEF29}" type="datetimeFigureOut">
               <a:rPr lang="en-US" smtClean="0"/>
-              <a:t>6/6/2026</a:t>
+              <a:t>6/7/2026</a:t>
             </a:fld>
             <a:endParaRPr lang="en-US"/>
           </a:p>
@@ -3800,7 +3800,7 @@
           <a:p>
             <a:fld id="{F55AF960-87D0-487C-BD50-BC6BA87EEF29}" type="datetimeFigureOut">
               <a:rPr lang="en-US" smtClean="0"/>
-              <a:t>6/6/2026</a:t>
+              <a:t>6/7/2026</a:t>
             </a:fld>
             <a:endParaRPr lang="en-US"/>
           </a:p>
@@ -4111,7 +4111,7 @@
           <a:p>
             <a:fld id="{F55AF960-87D0-487C-BD50-BC6BA87EEF29}" type="datetimeFigureOut">
               <a:rPr lang="en-US" smtClean="0"/>
-              <a:t>6/6/2026</a:t>
+              <a:t>6/7/2026</a:t>
             </a:fld>
             <a:endParaRPr lang="en-US"/>
           </a:p>
@@ -4399,7 +4399,7 @@
           <a:p>
             <a:fld id="{F55AF960-87D0-487C-BD50-BC6BA87EEF29}" type="datetimeFigureOut">
               <a:rPr lang="en-US" smtClean="0"/>
-              <a:t>6/6/2026</a:t>
+              <a:t>6/7/2026</a:t>
             </a:fld>
             <a:endParaRPr lang="en-US"/>
           </a:p>
@@ -4640,7 +4640,7 @@
           <a:p>
             <a:fld id="{F55AF960-87D0-487C-BD50-BC6BA87EEF29}" type="datetimeFigureOut">
               <a:rPr lang="en-US" smtClean="0"/>
-              <a:t>6/6/2026</a:t>
+              <a:t>6/7/2026</a:t>
             </a:fld>
             <a:endParaRPr lang="en-US"/>
           </a:p>

--- a/Deliveries/WES Capstone Video Slides.pptx
+++ b/Deliveries/WES Capstone Video Slides.pptx
@@ -424,7 +424,7 @@
           <a:p>
             <a:fld id="{3FC87381-5F87-4AAF-8B41-540099760EE8}" type="datetimeFigureOut">
               <a:rPr lang="en-US" smtClean="0"/>
-              <a:t>6/7/2026</a:t>
+              <a:t>6/8/2026</a:t>
             </a:fld>
             <a:endParaRPr lang="en-US"/>
           </a:p>
@@ -1990,7 +1990,7 @@
           <a:p>
             <a:fld id="{F55AF960-87D0-487C-BD50-BC6BA87EEF29}" type="datetimeFigureOut">
               <a:rPr lang="en-US" smtClean="0"/>
-              <a:t>6/7/2026</a:t>
+              <a:t>6/8/2026</a:t>
             </a:fld>
             <a:endParaRPr lang="en-US"/>
           </a:p>
@@ -2188,7 +2188,7 @@
           <a:p>
             <a:fld id="{F55AF960-87D0-487C-BD50-BC6BA87EEF29}" type="datetimeFigureOut">
               <a:rPr lang="en-US" smtClean="0"/>
-              <a:t>6/7/2026</a:t>
+              <a:t>6/8/2026</a:t>
             </a:fld>
             <a:endParaRPr lang="en-US"/>
           </a:p>
@@ -2396,7 +2396,7 @@
           <a:p>
             <a:fld id="{F55AF960-87D0-487C-BD50-BC6BA87EEF29}" type="datetimeFigureOut">
               <a:rPr lang="en-US" smtClean="0"/>
-              <a:t>6/7/2026</a:t>
+              <a:t>6/8/2026</a:t>
             </a:fld>
             <a:endParaRPr lang="en-US"/>
           </a:p>
@@ -2594,7 +2594,7 @@
           <a:p>
             <a:fld id="{F55AF960-87D0-487C-BD50-BC6BA87EEF29}" type="datetimeFigureOut">
               <a:rPr lang="en-US" smtClean="0"/>
-              <a:t>6/7/2026</a:t>
+              <a:t>6/8/2026</a:t>
             </a:fld>
             <a:endParaRPr lang="en-US"/>
           </a:p>
@@ -2869,7 +2869,7 @@
           <a:p>
             <a:fld id="{F55AF960-87D0-487C-BD50-BC6BA87EEF29}" type="datetimeFigureOut">
               <a:rPr lang="en-US" smtClean="0"/>
-              <a:t>6/7/2026</a:t>
+              <a:t>6/8/2026</a:t>
             </a:fld>
             <a:endParaRPr lang="en-US"/>
           </a:p>
@@ -3134,7 +3134,7 @@
           <a:p>
             <a:fld id="{F55AF960-87D0-487C-BD50-BC6BA87EEF29}" type="datetimeFigureOut">
               <a:rPr lang="en-US" smtClean="0"/>
-              <a:t>6/7/2026</a:t>
+              <a:t>6/8/2026</a:t>
             </a:fld>
             <a:endParaRPr lang="en-US"/>
           </a:p>
@@ -3546,7 +3546,7 @@
           <a:p>
             <a:fld id="{F55AF960-87D0-487C-BD50-BC6BA87EEF29}" type="datetimeFigureOut">
               <a:rPr lang="en-US" smtClean="0"/>
-              <a:t>6/7/2026</a:t>
+              <a:t>6/8/2026</a:t>
             </a:fld>
             <a:endParaRPr lang="en-US"/>
           </a:p>
@@ -3687,7 +3687,7 @@
           <a:p>
             <a:fld id="{F55AF960-87D0-487C-BD50-BC6BA87EEF29}" type="datetimeFigureOut">
               <a:rPr lang="en-US" smtClean="0"/>
-              <a:t>6/7/2026</a:t>
+              <a:t>6/8/2026</a:t>
             </a:fld>
             <a:endParaRPr lang="en-US"/>
           </a:p>
@@ -3800,7 +3800,7 @@
           <a:p>
             <a:fld id="{F55AF960-87D0-487C-BD50-BC6BA87EEF29}" type="datetimeFigureOut">
               <a:rPr lang="en-US" smtClean="0"/>
-              <a:t>6/7/2026</a:t>
+              <a:t>6/8/2026</a:t>
             </a:fld>
             <a:endParaRPr lang="en-US"/>
           </a:p>
@@ -4111,7 +4111,7 @@
           <a:p>
             <a:fld id="{F55AF960-87D0-487C-BD50-BC6BA87EEF29}" type="datetimeFigureOut">
               <a:rPr lang="en-US" smtClean="0"/>
-              <a:t>6/7/2026</a:t>
+              <a:t>6/8/2026</a:t>
             </a:fld>
             <a:endParaRPr lang="en-US"/>
           </a:p>
@@ -4399,7 +4399,7 @@
           <a:p>
             <a:fld id="{F55AF960-87D0-487C-BD50-BC6BA87EEF29}" type="datetimeFigureOut">
               <a:rPr lang="en-US" smtClean="0"/>
-              <a:t>6/7/2026</a:t>
+              <a:t>6/8/2026</a:t>
             </a:fld>
             <a:endParaRPr lang="en-US"/>
           </a:p>
@@ -4640,7 +4640,7 @@
           <a:p>
             <a:fld id="{F55AF960-87D0-487C-BD50-BC6BA87EEF29}" type="datetimeFigureOut">
               <a:rPr lang="en-US" smtClean="0"/>
-              <a:t>6/7/2026</a:t>
+              <a:t>6/8/2026</a:t>
             </a:fld>
             <a:endParaRPr lang="en-US"/>
           </a:p>
